--- a/engine/Recalibration_Process_Flow_17-09-2026.pptx
+++ b/engine/Recalibration_Process_Flow_17-09-2026.pptx
@@ -4631,7 +4631,7 @@
                 </a:solidFill>
                 <a:latin typeface="Georgia"/>
               </a:rPr>
-              <a:t>Generated from engine/Recalibration_Runbook_17-09-2026.md, revision 2026-09-17c — the runbook is authoritative and this deck is a reading of it.</a:t>
+              <a:t>Generated from engine/Recalibration_Runbook_17-09-2026.md, revision 2026-09-17d — the runbook is authoritative and this deck is a reading of it.</a:t>
             </a:r>
           </a:p>
         </p:txBody>
@@ -5238,7 +5238,7 @@
                 </a:solidFill>
                 <a:latin typeface="Georgia"/>
               </a:rPr>
-              <a:t>Runbook: engine/Recalibration_Runbook_17-09-2026.md (revision 2026-09-17c).   Programme: engine/Recalibration_Campaign_Plan_17-09-2026.md.   Read every number live, never off this slide.</a:t>
+              <a:t>Runbook: engine/Recalibration_Runbook_17-09-2026.md (revision 2026-09-17d).   Programme: engine/Recalibration_Campaign_Plan_17-09-2026.md.   Read every number live, never off this slide.</a:t>
             </a:r>
           </a:p>
         </p:txBody>
